--- a/generated/Tier 1 Broker Scorecards/CASCADE INSURANCE SERVICES INC DBA_ CASCADE MUTUAL INSURANCE SERVICES_Broker_Scorecard.pptx
+++ b/generated/Tier 1 Broker Scorecards/CASCADE INSURANCE SERVICES INC DBA_ CASCADE MUTUAL INSURANCE SERVICES_Broker_Scorecard.pptx
@@ -3394,7 +3394,7 @@
                         <a:rPr sz="900">
                           <a:latin typeface="Segoe UI"/>
                         </a:rPr>
-                        <a:t>Tier 1  |  11.41% / 15.00%</a:t>
+                        <a:t>Tier 1  |  11.02% / 15.00%</a:t>
                       </a:r>
                     </a:p>
                   </a:txBody>
@@ -3653,7 +3653,7 @@
                         <a:rPr sz="900">
                           <a:latin typeface="Segoe UI"/>
                         </a:rPr>
-                        <a:t>Fleet Subs: 101  |  Binds: 13</a:t>
+                        <a:t>Fleet Subs: 102  |  Binds: 12</a:t>
                       </a:r>
                     </a:p>
                   </a:txBody>
@@ -3690,7 +3690,7 @@
                         <a:rPr sz="900">
                           <a:latin typeface="Segoe UI"/>
                         </a:rPr>
-                        <a:t>Fleet Bound Premium: $1,411,912.74</a:t>
+                        <a:t>Fleet Bound Premium: $1,354,349.49</a:t>
                       </a:r>
                     </a:p>
                   </a:txBody>
@@ -3727,7 +3727,7 @@
                         <a:rPr sz="900">
                           <a:latin typeface="Segoe UI"/>
                         </a:rPr>
-                        <a:t>Fleet Book %: 49.5%</a:t>
+                        <a:t>Fleet Book %: 47.5%</a:t>
                       </a:r>
                     </a:p>
                   </a:txBody>
@@ -3766,7 +3766,7 @@
                         <a:rPr sz="900">
                           <a:latin typeface="Segoe UI"/>
                         </a:rPr>
-                        <a:t>Non-Fleet Subs: 539  |  Binds: 60</a:t>
+                        <a:t>Non-Fleet Subs: 542  |  Binds: 59</a:t>
                       </a:r>
                     </a:p>
                   </a:txBody>
@@ -3803,7 +3803,7 @@
                         <a:rPr sz="900">
                           <a:latin typeface="Segoe UI"/>
                         </a:rPr>
-                        <a:t>Non-Fleet Bound Premium: $1,437,848.50</a:t>
+                        <a:t>Non-Fleet Bound Premium: $1,495,411.75</a:t>
                       </a:r>
                     </a:p>
                   </a:txBody>
@@ -3840,7 +3840,7 @@
                         <a:rPr sz="900">
                           <a:latin typeface="Segoe UI"/>
                         </a:rPr>
-                        <a:t>Non-Fleet Book %: 50.5%</a:t>
+                        <a:t>Non-Fleet Book %: 52.5%</a:t>
                       </a:r>
                     </a:p>
                   </a:txBody>
@@ -4428,7 +4428,7 @@
                           </a:solidFill>
                           <a:latin typeface="Segoe UI"/>
                         </a:rPr>
-                        <a:t>71</a:t>
+                        <a:t>78</a:t>
                       </a:r>
                     </a:p>
                   </a:txBody>
@@ -4465,7 +4465,7 @@
                         <a:rPr sz="800">
                           <a:latin typeface="Segoe UI"/>
                         </a:rPr>
-                        <a:t>126</a:t>
+                        <a:t>125</a:t>
                       </a:r>
                     </a:p>
                   </a:txBody>
@@ -4707,7 +4707,7 @@
                           </a:solidFill>
                           <a:latin typeface="Segoe UI"/>
                         </a:rPr>
-                        <a:t>23.9%</a:t>
+                        <a:t>20.5%</a:t>
                       </a:r>
                     </a:p>
                   </a:txBody>
@@ -4747,7 +4747,7 @@
                         <a:rPr sz="800">
                           <a:latin typeface="Segoe UI"/>
                         </a:rPr>
-                        <a:t>23.0%</a:t>
+                        <a:t>22.4%</a:t>
                       </a:r>
                     </a:p>
                   </a:txBody>
@@ -4983,7 +4983,7 @@
                           </a:solidFill>
                           <a:latin typeface="Segoe UI"/>
                         </a:rPr>
-                        <a:t>17</a:t>
+                        <a:t>16</a:t>
                       </a:r>
                     </a:p>
                   </a:txBody>
@@ -5020,7 +5020,7 @@
                         <a:rPr sz="800">
                           <a:latin typeface="Segoe UI"/>
                         </a:rPr>
-                        <a:t>29</a:t>
+                        <a:t>28</a:t>
                       </a:r>
                     </a:p>
                   </a:txBody>

--- a/generated/Tier 1 Broker Scorecards/CASCADE INSURANCE SERVICES INC DBA_ CASCADE MUTUAL INSURANCE SERVICES_Broker_Scorecard.pptx
+++ b/generated/Tier 1 Broker Scorecards/CASCADE INSURANCE SERVICES INC DBA_ CASCADE MUTUAL INSURANCE SERVICES_Broker_Scorecard.pptx
@@ -3394,7 +3394,7 @@
                         <a:rPr sz="900">
                           <a:latin typeface="Segoe UI"/>
                         </a:rPr>
-                        <a:t>Tier 1  |  11.02% / 15.00%</a:t>
+                        <a:t>Tier 1  |  11.15% / 15.00%</a:t>
                       </a:r>
                     </a:p>
                   </a:txBody>
@@ -3653,7 +3653,7 @@
                         <a:rPr sz="900">
                           <a:latin typeface="Segoe UI"/>
                         </a:rPr>
-                        <a:t>Fleet Subs: 102  |  Binds: 12</a:t>
+                        <a:t>Fleet Subs: 102  |  Binds: 13</a:t>
                       </a:r>
                     </a:p>
                   </a:txBody>
@@ -3690,7 +3690,7 @@
                         <a:rPr sz="900">
                           <a:latin typeface="Segoe UI"/>
                         </a:rPr>
-                        <a:t>Fleet Bound Premium: $1,354,349.49</a:t>
+                        <a:t>Fleet Bound Premium: $1,414,716.28</a:t>
                       </a:r>
                     </a:p>
                   </a:txBody>
@@ -3727,7 +3727,7 @@
                         <a:rPr sz="900">
                           <a:latin typeface="Segoe UI"/>
                         </a:rPr>
-                        <a:t>Fleet Book %: 47.5%</a:t>
+                        <a:t>Fleet Book %: 49.6%</a:t>
                       </a:r>
                     </a:p>
                   </a:txBody>
@@ -3766,7 +3766,7 @@
                         <a:rPr sz="900">
                           <a:latin typeface="Segoe UI"/>
                         </a:rPr>
-                        <a:t>Non-Fleet Subs: 542  |  Binds: 59</a:t>
+                        <a:t>Non-Fleet Subs: 544  |  Binds: 59</a:t>
                       </a:r>
                     </a:p>
                   </a:txBody>
@@ -3803,7 +3803,7 @@
                         <a:rPr sz="900">
                           <a:latin typeface="Segoe UI"/>
                         </a:rPr>
-                        <a:t>Non-Fleet Bound Premium: $1,495,411.75</a:t>
+                        <a:t>Non-Fleet Bound Premium: $1,435,044.96</a:t>
                       </a:r>
                     </a:p>
                   </a:txBody>
@@ -3840,7 +3840,7 @@
                         <a:rPr sz="900">
                           <a:latin typeface="Segoe UI"/>
                         </a:rPr>
-                        <a:t>Non-Fleet Book %: 52.5%</a:t>
+                        <a:t>Non-Fleet Book %: 50.4%</a:t>
                       </a:r>
                     </a:p>
                   </a:txBody>
@@ -4428,7 +4428,7 @@
                           </a:solidFill>
                           <a:latin typeface="Segoe UI"/>
                         </a:rPr>
-                        <a:t>78</a:t>
+                        <a:t>84</a:t>
                       </a:r>
                     </a:p>
                   </a:txBody>
@@ -4707,7 +4707,7 @@
                           </a:solidFill>
                           <a:latin typeface="Segoe UI"/>
                         </a:rPr>
-                        <a:t>20.5%</a:t>
+                        <a:t>22.6%</a:t>
                       </a:r>
                     </a:p>
                   </a:txBody>
@@ -4983,7 +4983,7 @@
                           </a:solidFill>
                           <a:latin typeface="Segoe UI"/>
                         </a:rPr>
-                        <a:t>16</a:t>
+                        <a:t>19</a:t>
                       </a:r>
                     </a:p>
                   </a:txBody>

--- a/generated/Tier 1 Broker Scorecards/CASCADE INSURANCE SERVICES INC DBA_ CASCADE MUTUAL INSURANCE SERVICES_Broker_Scorecard.pptx
+++ b/generated/Tier 1 Broker Scorecards/CASCADE INSURANCE SERVICES INC DBA_ CASCADE MUTUAL INSURANCE SERVICES_Broker_Scorecard.pptx
@@ -3357,7 +3357,7 @@
                         <a:rPr sz="800">
                           <a:latin typeface="Segoe UI"/>
                         </a:rPr>
-                        <a:t>$1,687,025.60 / $4,488,978.26 / $2,849,761.24</a:t>
+                        <a:t>$1,687,025.60 / $4,569,678.04 / $2,930,461.02</a:t>
                       </a:r>
                     </a:p>
                   </a:txBody>
@@ -3394,7 +3394,7 @@
                         <a:rPr sz="900">
                           <a:latin typeface="Segoe UI"/>
                         </a:rPr>
-                        <a:t>Tier 1  |  11.15% / 15.00%</a:t>
+                        <a:t>Tier 1  |  10.82% / 15.00%</a:t>
                       </a:r>
                     </a:p>
                   </a:txBody>
@@ -3431,7 +3431,7 @@
                         <a:rPr sz="900">
                           <a:latin typeface="Segoe UI"/>
                         </a:rPr>
-                        <a:t>$2,361,835.84  (120.7% achieved)</a:t>
+                        <a:t>$2,361,835.84  (124.1% achieved)</a:t>
                       </a:r>
                     </a:p>
                   </a:txBody>
@@ -3690,7 +3690,7 @@
                         <a:rPr sz="900">
                           <a:latin typeface="Segoe UI"/>
                         </a:rPr>
-                        <a:t>Fleet Bound Premium: $1,414,716.28</a:t>
+                        <a:t>Fleet Bound Premium: $1,438,951.27</a:t>
                       </a:r>
                     </a:p>
                   </a:txBody>
@@ -3727,7 +3727,7 @@
                         <a:rPr sz="900">
                           <a:latin typeface="Segoe UI"/>
                         </a:rPr>
-                        <a:t>Fleet Book %: 49.6%</a:t>
+                        <a:t>Fleet Book %: 49.1%</a:t>
                       </a:r>
                     </a:p>
                   </a:txBody>
@@ -3766,7 +3766,7 @@
                         <a:rPr sz="900">
                           <a:latin typeface="Segoe UI"/>
                         </a:rPr>
-                        <a:t>Non-Fleet Subs: 544  |  Binds: 59</a:t>
+                        <a:t>Non-Fleet Subs: 545  |  Binds: 57</a:t>
                       </a:r>
                     </a:p>
                   </a:txBody>
@@ -3803,7 +3803,7 @@
                         <a:rPr sz="900">
                           <a:latin typeface="Segoe UI"/>
                         </a:rPr>
-                        <a:t>Non-Fleet Bound Premium: $1,435,044.96</a:t>
+                        <a:t>Non-Fleet Bound Premium: $1,491,509.75</a:t>
                       </a:r>
                     </a:p>
                   </a:txBody>
@@ -3840,7 +3840,7 @@
                         <a:rPr sz="900">
                           <a:latin typeface="Segoe UI"/>
                         </a:rPr>
-                        <a:t>Non-Fleet Book %: 50.4%</a:t>
+                        <a:t>Non-Fleet Book %: 50.9%</a:t>
                       </a:r>
                     </a:p>
                   </a:txBody>
@@ -4428,7 +4428,7 @@
                           </a:solidFill>
                           <a:latin typeface="Segoe UI"/>
                         </a:rPr>
-                        <a:t>84</a:t>
+                        <a:t>86</a:t>
                       </a:r>
                     </a:p>
                   </a:txBody>
@@ -4465,7 +4465,7 @@
                         <a:rPr sz="800">
                           <a:latin typeface="Segoe UI"/>
                         </a:rPr>
-                        <a:t>125</a:t>
+                        <a:t>126</a:t>
                       </a:r>
                     </a:p>
                   </a:txBody>
@@ -4624,7 +4624,7 @@
                           </a:solidFill>
                           <a:latin typeface="Segoe UI"/>
                         </a:rPr>
-                        <a:t>14.6%</a:t>
+                        <a:t>14.1%</a:t>
                       </a:r>
                     </a:p>
                   </a:txBody>
@@ -4707,7 +4707,7 @@
                           </a:solidFill>
                           <a:latin typeface="Segoe UI"/>
                         </a:rPr>
-                        <a:t>22.6%</a:t>
+                        <a:t>22.1%</a:t>
                       </a:r>
                     </a:p>
                   </a:txBody>
@@ -4747,7 +4747,7 @@
                         <a:rPr sz="800">
                           <a:latin typeface="Segoe UI"/>
                         </a:rPr>
-                        <a:t>22.4%</a:t>
+                        <a:t>23.0%</a:t>
                       </a:r>
                     </a:p>
                   </a:txBody>
@@ -4906,7 +4906,7 @@
                           </a:solidFill>
                           <a:latin typeface="Segoe UI"/>
                         </a:rPr>
-                        <a:t>29</a:t>
+                        <a:t>28</a:t>
                       </a:r>
                     </a:p>
                   </a:txBody>
@@ -5020,7 +5020,7 @@
                         <a:rPr sz="800">
                           <a:latin typeface="Segoe UI"/>
                         </a:rPr>
-                        <a:t>28</a:t>
+                        <a:t>29</a:t>
                       </a:r>
                     </a:p>
                   </a:txBody>
@@ -5259,7 +5259,7 @@
                         <a:rPr sz="800" b="1">
                           <a:latin typeface="Segoe UI"/>
                         </a:rPr>
-                        <a:t>$321.4K</a:t>
+                        <a:t>$402.1K</a:t>
                       </a:r>
                     </a:p>
                   </a:txBody>

--- a/generated/Tier 1 Broker Scorecards/CASCADE INSURANCE SERVICES INC DBA_ CASCADE MUTUAL INSURANCE SERVICES_Broker_Scorecard.pptx
+++ b/generated/Tier 1 Broker Scorecards/CASCADE INSURANCE SERVICES INC DBA_ CASCADE MUTUAL INSURANCE SERVICES_Broker_Scorecard.pptx
@@ -3357,7 +3357,7 @@
                         <a:rPr sz="800">
                           <a:latin typeface="Segoe UI"/>
                         </a:rPr>
-                        <a:t>$1,687,025.60 / $4,569,678.04 / $2,930,461.02</a:t>
+                        <a:t>$1,687,025.60 / $4,629,476.64 / $2,990,259.62</a:t>
                       </a:r>
                     </a:p>
                   </a:txBody>
@@ -3394,7 +3394,7 @@
                         <a:rPr sz="900">
                           <a:latin typeface="Segoe UI"/>
                         </a:rPr>
-                        <a:t>Tier 1  |  10.82% / 15.00%</a:t>
+                        <a:t>Tier 1  |  10.53% / 15.00%</a:t>
                       </a:r>
                     </a:p>
                   </a:txBody>
@@ -3431,7 +3431,7 @@
                         <a:rPr sz="900">
                           <a:latin typeface="Segoe UI"/>
                         </a:rPr>
-                        <a:t>$2,361,835.84  (124.1% achieved)</a:t>
+                        <a:t>$2,361,835.84  (126.6% achieved)</a:t>
                       </a:r>
                     </a:p>
                   </a:txBody>
@@ -3653,7 +3653,7 @@
                         <a:rPr sz="900">
                           <a:latin typeface="Segoe UI"/>
                         </a:rPr>
-                        <a:t>Fleet Subs: 102  |  Binds: 13</a:t>
+                        <a:t>Fleet Subs: 103  |  Binds: 12</a:t>
                       </a:r>
                     </a:p>
                   </a:txBody>
@@ -3690,7 +3690,7 @@
                         <a:rPr sz="900">
                           <a:latin typeface="Segoe UI"/>
                         </a:rPr>
-                        <a:t>Fleet Bound Premium: $1,438,951.27</a:t>
+                        <a:t>Fleet Bound Premium: $1,441,343.84</a:t>
                       </a:r>
                     </a:p>
                   </a:txBody>
@@ -3727,7 +3727,7 @@
                         <a:rPr sz="900">
                           <a:latin typeface="Segoe UI"/>
                         </a:rPr>
-                        <a:t>Fleet Book %: 49.1%</a:t>
+                        <a:t>Fleet Book %: 48.2%</a:t>
                       </a:r>
                     </a:p>
                   </a:txBody>
@@ -3766,7 +3766,7 @@
                         <a:rPr sz="900">
                           <a:latin typeface="Segoe UI"/>
                         </a:rPr>
-                        <a:t>Non-Fleet Subs: 545  |  Binds: 57</a:t>
+                        <a:t>Non-Fleet Subs: 552  |  Binds: 57</a:t>
                       </a:r>
                     </a:p>
                   </a:txBody>
@@ -3803,7 +3803,7 @@
                         <a:rPr sz="900">
                           <a:latin typeface="Segoe UI"/>
                         </a:rPr>
-                        <a:t>Non-Fleet Bound Premium: $1,491,509.75</a:t>
+                        <a:t>Non-Fleet Bound Premium: $1,548,915.78</a:t>
                       </a:r>
                     </a:p>
                   </a:txBody>
@@ -3840,7 +3840,7 @@
                         <a:rPr sz="900">
                           <a:latin typeface="Segoe UI"/>
                         </a:rPr>
-                        <a:t>Non-Fleet Book %: 50.9%</a:t>
+                        <a:t>Non-Fleet Book %: 51.8%</a:t>
                       </a:r>
                     </a:p>
                   </a:txBody>
@@ -4428,7 +4428,7 @@
                           </a:solidFill>
                           <a:latin typeface="Segoe UI"/>
                         </a:rPr>
-                        <a:t>86</a:t>
+                        <a:t>95</a:t>
                       </a:r>
                     </a:p>
                   </a:txBody>
@@ -4465,7 +4465,7 @@
                         <a:rPr sz="800">
                           <a:latin typeface="Segoe UI"/>
                         </a:rPr>
-                        <a:t>126</a:t>
+                        <a:t>125</a:t>
                       </a:r>
                     </a:p>
                   </a:txBody>
@@ -4703,11 +4703,11 @@
                       <a:r>
                         <a:rPr sz="800">
                           <a:solidFill>
-                            <a:srgbClr val="059669"/>
+                            <a:srgbClr val="DC2626"/>
                           </a:solidFill>
                           <a:latin typeface="Segoe UI"/>
                         </a:rPr>
-                        <a:t>22.1%</a:t>
+                        <a:t>18.9%</a:t>
                       </a:r>
                     </a:p>
                   </a:txBody>
@@ -4747,7 +4747,7 @@
                         <a:rPr sz="800">
                           <a:latin typeface="Segoe UI"/>
                         </a:rPr>
-                        <a:t>23.0%</a:t>
+                        <a:t>22.4%</a:t>
                       </a:r>
                     </a:p>
                   </a:txBody>
@@ -4983,7 +4983,7 @@
                           </a:solidFill>
                           <a:latin typeface="Segoe UI"/>
                         </a:rPr>
-                        <a:t>19</a:t>
+                        <a:t>18</a:t>
                       </a:r>
                     </a:p>
                   </a:txBody>
@@ -5020,7 +5020,7 @@
                         <a:rPr sz="800">
                           <a:latin typeface="Segoe UI"/>
                         </a:rPr>
-                        <a:t>29</a:t>
+                        <a:t>28</a:t>
                       </a:r>
                     </a:p>
                   </a:txBody>
@@ -5259,7 +5259,7 @@
                         <a:rPr sz="800" b="1">
                           <a:latin typeface="Segoe UI"/>
                         </a:rPr>
-                        <a:t>$402.1K</a:t>
+                        <a:t>$461.9K</a:t>
                       </a:r>
                     </a:p>
                   </a:txBody>

--- a/generated/Tier 1 Broker Scorecards/CASCADE INSURANCE SERVICES INC DBA_ CASCADE MUTUAL INSURANCE SERVICES_Broker_Scorecard.pptx
+++ b/generated/Tier 1 Broker Scorecards/CASCADE INSURANCE SERVICES INC DBA_ CASCADE MUTUAL INSURANCE SERVICES_Broker_Scorecard.pptx
@@ -3357,7 +3357,7 @@
                         <a:rPr sz="800">
                           <a:latin typeface="Segoe UI"/>
                         </a:rPr>
-                        <a:t>$1,687,025.60 / $4,629,476.64 / $2,990,259.62</a:t>
+                        <a:t>$1,687,025.60 / $4,771,168.83 / $3,131,951.81</a:t>
                       </a:r>
                     </a:p>
                   </a:txBody>
@@ -3394,7 +3394,7 @@
                         <a:rPr sz="900">
                           <a:latin typeface="Segoe UI"/>
                         </a:rPr>
-                        <a:t>Tier 1  |  10.53% / 15.00%</a:t>
+                        <a:t>Tier 1  |  10.52% / 15.00%</a:t>
                       </a:r>
                     </a:p>
                   </a:txBody>
@@ -3431,7 +3431,7 @@
                         <a:rPr sz="900">
                           <a:latin typeface="Segoe UI"/>
                         </a:rPr>
-                        <a:t>$2,361,835.84  (126.6% achieved)</a:t>
+                        <a:t>$2,361,835.84  (132.6% achieved)</a:t>
                       </a:r>
                     </a:p>
                   </a:txBody>
@@ -3690,7 +3690,7 @@
                         <a:rPr sz="900">
                           <a:latin typeface="Segoe UI"/>
                         </a:rPr>
-                        <a:t>Fleet Bound Premium: $1,441,343.84</a:t>
+                        <a:t>Fleet Bound Premium: $1,525,527.78</a:t>
                       </a:r>
                     </a:p>
                   </a:txBody>
@@ -3727,7 +3727,7 @@
                         <a:rPr sz="900">
                           <a:latin typeface="Segoe UI"/>
                         </a:rPr>
-                        <a:t>Fleet Book %: 48.2%</a:t>
+                        <a:t>Fleet Book %: 48.7%</a:t>
                       </a:r>
                     </a:p>
                   </a:txBody>
@@ -3766,7 +3766,7 @@
                         <a:rPr sz="900">
                           <a:latin typeface="Segoe UI"/>
                         </a:rPr>
-                        <a:t>Non-Fleet Subs: 552  |  Binds: 57</a:t>
+                        <a:t>Non-Fleet Subs: 553  |  Binds: 57</a:t>
                       </a:r>
                     </a:p>
                   </a:txBody>
@@ -3803,7 +3803,7 @@
                         <a:rPr sz="900">
                           <a:latin typeface="Segoe UI"/>
                         </a:rPr>
-                        <a:t>Non-Fleet Bound Premium: $1,548,915.78</a:t>
+                        <a:t>Non-Fleet Bound Premium: $1,606,424.03</a:t>
                       </a:r>
                     </a:p>
                   </a:txBody>
@@ -3840,7 +3840,7 @@
                         <a:rPr sz="900">
                           <a:latin typeface="Segoe UI"/>
                         </a:rPr>
-                        <a:t>Non-Fleet Book %: 51.8%</a:t>
+                        <a:t>Non-Fleet Book %: 51.3%</a:t>
                       </a:r>
                     </a:p>
                   </a:txBody>
@@ -4428,7 +4428,7 @@
                           </a:solidFill>
                           <a:latin typeface="Segoe UI"/>
                         </a:rPr>
-                        <a:t>95</a:t>
+                        <a:t>98</a:t>
                       </a:r>
                     </a:p>
                   </a:txBody>
@@ -4703,11 +4703,11 @@
                       <a:r>
                         <a:rPr sz="800">
                           <a:solidFill>
-                            <a:srgbClr val="DC2626"/>
+                            <a:srgbClr val="059669"/>
                           </a:solidFill>
                           <a:latin typeface="Segoe UI"/>
                         </a:rPr>
-                        <a:t>18.9%</a:t>
+                        <a:t>20.4%</a:t>
                       </a:r>
                     </a:p>
                   </a:txBody>
@@ -4983,7 +4983,7 @@
                           </a:solidFill>
                           <a:latin typeface="Segoe UI"/>
                         </a:rPr>
-                        <a:t>18</a:t>
+                        <a:t>20</a:t>
                       </a:r>
                     </a:p>
                   </a:txBody>
@@ -5259,7 +5259,7 @@
                         <a:rPr sz="800" b="1">
                           <a:latin typeface="Segoe UI"/>
                         </a:rPr>
-                        <a:t>$461.9K</a:t>
+                        <a:t>$603.6K</a:t>
                       </a:r>
                     </a:p>
                   </a:txBody>

--- a/generated/Tier 1 Broker Scorecards/CASCADE INSURANCE SERVICES INC DBA_ CASCADE MUTUAL INSURANCE SERVICES_Broker_Scorecard.pptx
+++ b/generated/Tier 1 Broker Scorecards/CASCADE INSURANCE SERVICES INC DBA_ CASCADE MUTUAL INSURANCE SERVICES_Broker_Scorecard.pptx
@@ -3690,7 +3690,7 @@
                         <a:rPr sz="900">
                           <a:latin typeface="Segoe UI"/>
                         </a:rPr>
-                        <a:t>Fleet Bound Premium: $1,525,527.78</a:t>
+                        <a:t>Fleet Bound Premium: $1,509,463.29</a:t>
                       </a:r>
                     </a:p>
                   </a:txBody>
@@ -3727,7 +3727,7 @@
                         <a:rPr sz="900">
                           <a:latin typeface="Segoe UI"/>
                         </a:rPr>
-                        <a:t>Fleet Book %: 48.7%</a:t>
+                        <a:t>Fleet Book %: 48.2%</a:t>
                       </a:r>
                     </a:p>
                   </a:txBody>
@@ -3803,7 +3803,7 @@
                         <a:rPr sz="900">
                           <a:latin typeface="Segoe UI"/>
                         </a:rPr>
-                        <a:t>Non-Fleet Bound Premium: $1,606,424.03</a:t>
+                        <a:t>Non-Fleet Bound Premium: $1,622,488.52</a:t>
                       </a:r>
                     </a:p>
                   </a:txBody>
@@ -3840,7 +3840,7 @@
                         <a:rPr sz="900">
                           <a:latin typeface="Segoe UI"/>
                         </a:rPr>
-                        <a:t>Non-Fleet Book %: 51.3%</a:t>
+                        <a:t>Non-Fleet Book %: 51.8%</a:t>
                       </a:r>
                     </a:p>
                   </a:txBody>
@@ -4428,7 +4428,7 @@
                           </a:solidFill>
                           <a:latin typeface="Segoe UI"/>
                         </a:rPr>
-                        <a:t>98</a:t>
+                        <a:t>99</a:t>
                       </a:r>
                     </a:p>
                   </a:txBody>
@@ -4465,7 +4465,7 @@
                         <a:rPr sz="800">
                           <a:latin typeface="Segoe UI"/>
                         </a:rPr>
-                        <a:t>125</a:t>
+                        <a:t>126</a:t>
                       </a:r>
                     </a:p>
                   </a:txBody>
@@ -4707,7 +4707,7 @@
                           </a:solidFill>
                           <a:latin typeface="Segoe UI"/>
                         </a:rPr>
-                        <a:t>20.4%</a:t>
+                        <a:t>20.2%</a:t>
                       </a:r>
                     </a:p>
                   </a:txBody>
@@ -4747,7 +4747,7 @@
                         <a:rPr sz="800">
                           <a:latin typeface="Segoe UI"/>
                         </a:rPr>
-                        <a:t>22.4%</a:t>
+                        <a:t>23.0%</a:t>
                       </a:r>
                     </a:p>
                   </a:txBody>
@@ -5020,7 +5020,7 @@
                         <a:rPr sz="800">
                           <a:latin typeface="Segoe UI"/>
                         </a:rPr>
-                        <a:t>28</a:t>
+                        <a:t>29</a:t>
                       </a:r>
                     </a:p>
                   </a:txBody>

--- a/generated/Tier 1 Broker Scorecards/CASCADE INSURANCE SERVICES INC DBA_ CASCADE MUTUAL INSURANCE SERVICES_Broker_Scorecard.pptx
+++ b/generated/Tier 1 Broker Scorecards/CASCADE INSURANCE SERVICES INC DBA_ CASCADE MUTUAL INSURANCE SERVICES_Broker_Scorecard.pptx
@@ -3394,7 +3394,7 @@
                         <a:rPr sz="900">
                           <a:latin typeface="Segoe UI"/>
                         </a:rPr>
-                        <a:t>Tier 1  |  10.52% / 15.00%</a:t>
+                        <a:t>Tier 1  |  10.50% / 15.00%</a:t>
                       </a:r>
                     </a:p>
                   </a:txBody>
@@ -3690,7 +3690,7 @@
                         <a:rPr sz="900">
                           <a:latin typeface="Segoe UI"/>
                         </a:rPr>
-                        <a:t>Fleet Bound Premium: $1,509,463.29</a:t>
+                        <a:t>Fleet Bound Premium: $1,518,265.84</a:t>
                       </a:r>
                     </a:p>
                   </a:txBody>
@@ -3727,7 +3727,7 @@
                         <a:rPr sz="900">
                           <a:latin typeface="Segoe UI"/>
                         </a:rPr>
-                        <a:t>Fleet Book %: 48.2%</a:t>
+                        <a:t>Fleet Book %: 48.5%</a:t>
                       </a:r>
                     </a:p>
                   </a:txBody>
@@ -3766,7 +3766,7 @@
                         <a:rPr sz="900">
                           <a:latin typeface="Segoe UI"/>
                         </a:rPr>
-                        <a:t>Non-Fleet Subs: 553  |  Binds: 57</a:t>
+                        <a:t>Non-Fleet Subs: 554  |  Binds: 57</a:t>
                       </a:r>
                     </a:p>
                   </a:txBody>
@@ -3803,7 +3803,7 @@
                         <a:rPr sz="900">
                           <a:latin typeface="Segoe UI"/>
                         </a:rPr>
-                        <a:t>Non-Fleet Bound Premium: $1,622,488.52</a:t>
+                        <a:t>Non-Fleet Bound Premium: $1,613,685.97</a:t>
                       </a:r>
                     </a:p>
                   </a:txBody>
@@ -3840,7 +3840,7 @@
                         <a:rPr sz="900">
                           <a:latin typeface="Segoe UI"/>
                         </a:rPr>
-                        <a:t>Non-Fleet Book %: 51.8%</a:t>
+                        <a:t>Non-Fleet Book %: 51.5%</a:t>
                       </a:r>
                     </a:p>
                   </a:txBody>
@@ -4428,7 +4428,7 @@
                           </a:solidFill>
                           <a:latin typeface="Segoe UI"/>
                         </a:rPr>
-                        <a:t>99</a:t>
+                        <a:t>100</a:t>
                       </a:r>
                     </a:p>
                   </a:txBody>
@@ -4465,7 +4465,7 @@
                         <a:rPr sz="800">
                           <a:latin typeface="Segoe UI"/>
                         </a:rPr>
-                        <a:t>126</a:t>
+                        <a:t>125</a:t>
                       </a:r>
                     </a:p>
                   </a:txBody>
@@ -4707,7 +4707,7 @@
                           </a:solidFill>
                           <a:latin typeface="Segoe UI"/>
                         </a:rPr>
-                        <a:t>20.2%</a:t>
+                        <a:t>20.0%</a:t>
                       </a:r>
                     </a:p>
                   </a:txBody>
@@ -4747,7 +4747,7 @@
                         <a:rPr sz="800">
                           <a:latin typeface="Segoe UI"/>
                         </a:rPr>
-                        <a:t>23.0%</a:t>
+                        <a:t>22.4%</a:t>
                       </a:r>
                     </a:p>
                   </a:txBody>
@@ -5020,7 +5020,7 @@
                         <a:rPr sz="800">
                           <a:latin typeface="Segoe UI"/>
                         </a:rPr>
-                        <a:t>29</a:t>
+                        <a:t>28</a:t>
                       </a:r>
                     </a:p>
                   </a:txBody>

--- a/generated/Tier 1 Broker Scorecards/CASCADE INSURANCE SERVICES INC DBA_ CASCADE MUTUAL INSURANCE SERVICES_Broker_Scorecard.pptx
+++ b/generated/Tier 1 Broker Scorecards/CASCADE INSURANCE SERVICES INC DBA_ CASCADE MUTUAL INSURANCE SERVICES_Broker_Scorecard.pptx
@@ -3394,7 +3394,7 @@
                         <a:rPr sz="900">
                           <a:latin typeface="Segoe UI"/>
                         </a:rPr>
-                        <a:t>Tier 1  |  10.50% / 15.00%</a:t>
+                        <a:t>Tier 1  |  10.61% / 15.00%</a:t>
                       </a:r>
                     </a:p>
                   </a:txBody>
@@ -3653,7 +3653,7 @@
                         <a:rPr sz="900">
                           <a:latin typeface="Segoe UI"/>
                         </a:rPr>
-                        <a:t>Fleet Subs: 103  |  Binds: 12</a:t>
+                        <a:t>Fleet Subs: 104  |  Binds: 12</a:t>
                       </a:r>
                     </a:p>
                   </a:txBody>
@@ -3690,7 +3690,7 @@
                         <a:rPr sz="900">
                           <a:latin typeface="Segoe UI"/>
                         </a:rPr>
-                        <a:t>Fleet Bound Premium: $1,518,265.84</a:t>
+                        <a:t>Fleet Bound Premium: $1,504,566.14</a:t>
                       </a:r>
                     </a:p>
                   </a:txBody>
@@ -3727,7 +3727,7 @@
                         <a:rPr sz="900">
                           <a:latin typeface="Segoe UI"/>
                         </a:rPr>
-                        <a:t>Fleet Book %: 48.5%</a:t>
+                        <a:t>Fleet Book %: 48.0%</a:t>
                       </a:r>
                     </a:p>
                   </a:txBody>
@@ -3766,7 +3766,7 @@
                         <a:rPr sz="900">
                           <a:latin typeface="Segoe UI"/>
                         </a:rPr>
-                        <a:t>Non-Fleet Subs: 554  |  Binds: 57</a:t>
+                        <a:t>Non-Fleet Subs: 556  |  Binds: 58</a:t>
                       </a:r>
                     </a:p>
                   </a:txBody>
@@ -3803,7 +3803,7 @@
                         <a:rPr sz="900">
                           <a:latin typeface="Segoe UI"/>
                         </a:rPr>
-                        <a:t>Non-Fleet Bound Premium: $1,613,685.97</a:t>
+                        <a:t>Non-Fleet Bound Premium: $1,627,385.67</a:t>
                       </a:r>
                     </a:p>
                   </a:txBody>
@@ -3840,7 +3840,7 @@
                         <a:rPr sz="900">
                           <a:latin typeface="Segoe UI"/>
                         </a:rPr>
-                        <a:t>Non-Fleet Book %: 51.5%</a:t>
+                        <a:t>Non-Fleet Book %: 52.0%</a:t>
                       </a:r>
                     </a:p>
                   </a:txBody>
@@ -4428,7 +4428,7 @@
                           </a:solidFill>
                           <a:latin typeface="Segoe UI"/>
                         </a:rPr>
-                        <a:t>100</a:t>
+                        <a:t>103</a:t>
                       </a:r>
                     </a:p>
                   </a:txBody>
@@ -4465,7 +4465,7 @@
                         <a:rPr sz="800">
                           <a:latin typeface="Segoe UI"/>
                         </a:rPr>
-                        <a:t>125</a:t>
+                        <a:t>126</a:t>
                       </a:r>
                     </a:p>
                   </a:txBody>
@@ -4707,7 +4707,7 @@
                           </a:solidFill>
                           <a:latin typeface="Segoe UI"/>
                         </a:rPr>
-                        <a:t>20.0%</a:t>
+                        <a:t>19.4%</a:t>
                       </a:r>
                     </a:p>
                   </a:txBody>
@@ -4747,7 +4747,7 @@
                         <a:rPr sz="800">
                           <a:latin typeface="Segoe UI"/>
                         </a:rPr>
-                        <a:t>22.4%</a:t>
+                        <a:t>23.0%</a:t>
                       </a:r>
                     </a:p>
                   </a:txBody>
@@ -5020,7 +5020,7 @@
                         <a:rPr sz="800">
                           <a:latin typeface="Segoe UI"/>
                         </a:rPr>
-                        <a:t>28</a:t>
+                        <a:t>29</a:t>
                       </a:r>
                     </a:p>
                   </a:txBody>

--- a/generated/Tier 1 Broker Scorecards/CASCADE INSURANCE SERVICES INC DBA_ CASCADE MUTUAL INSURANCE SERVICES_Broker_Scorecard.pptx
+++ b/generated/Tier 1 Broker Scorecards/CASCADE INSURANCE SERVICES INC DBA_ CASCADE MUTUAL INSURANCE SERVICES_Broker_Scorecard.pptx
@@ -3357,7 +3357,7 @@
                         <a:rPr sz="800">
                           <a:latin typeface="Segoe UI"/>
                         </a:rPr>
-                        <a:t>$1,687,025.60 / $4,771,168.83 / $3,131,951.81</a:t>
+                        <a:t>$1,687,025.60 / $4,772,106.13 / $3,132,889.11</a:t>
                       </a:r>
                     </a:p>
                   </a:txBody>
@@ -3394,7 +3394,7 @@
                         <a:rPr sz="900">
                           <a:latin typeface="Segoe UI"/>
                         </a:rPr>
-                        <a:t>Tier 1  |  10.61% / 15.00%</a:t>
+                        <a:t>Tier 1  |  10.23% / 15.00%</a:t>
                       </a:r>
                     </a:p>
                   </a:txBody>
@@ -3653,7 +3653,7 @@
                         <a:rPr sz="900">
                           <a:latin typeface="Segoe UI"/>
                         </a:rPr>
-                        <a:t>Fleet Subs: 104  |  Binds: 12</a:t>
+                        <a:t>Fleet Subs: 106  |  Binds: 12</a:t>
                       </a:r>
                     </a:p>
                   </a:txBody>
@@ -3690,7 +3690,7 @@
                         <a:rPr sz="900">
                           <a:latin typeface="Segoe UI"/>
                         </a:rPr>
-                        <a:t>Fleet Bound Premium: $1,504,566.14</a:t>
+                        <a:t>Fleet Bound Premium: $1,530,898.89</a:t>
                       </a:r>
                     </a:p>
                   </a:txBody>
@@ -3727,7 +3727,7 @@
                         <a:rPr sz="900">
                           <a:latin typeface="Segoe UI"/>
                         </a:rPr>
-                        <a:t>Fleet Book %: 48.0%</a:t>
+                        <a:t>Fleet Book %: 48.9%</a:t>
                       </a:r>
                     </a:p>
                   </a:txBody>
@@ -3766,7 +3766,7 @@
                         <a:rPr sz="900">
                           <a:latin typeface="Segoe UI"/>
                         </a:rPr>
-                        <a:t>Non-Fleet Subs: 556  |  Binds: 58</a:t>
+                        <a:t>Non-Fleet Subs: 559  |  Binds: 56</a:t>
                       </a:r>
                     </a:p>
                   </a:txBody>
@@ -3803,7 +3803,7 @@
                         <a:rPr sz="900">
                           <a:latin typeface="Segoe UI"/>
                         </a:rPr>
-                        <a:t>Non-Fleet Bound Premium: $1,627,385.67</a:t>
+                        <a:t>Non-Fleet Bound Premium: $1,601,990.22</a:t>
                       </a:r>
                     </a:p>
                   </a:txBody>
@@ -3840,7 +3840,7 @@
                         <a:rPr sz="900">
                           <a:latin typeface="Segoe UI"/>
                         </a:rPr>
-                        <a:t>Non-Fleet Book %: 52.0%</a:t>
+                        <a:t>Non-Fleet Book %: 51.1%</a:t>
                       </a:r>
                     </a:p>
                   </a:txBody>
@@ -4351,7 +4351,7 @@
                           </a:solidFill>
                           <a:latin typeface="Segoe UI"/>
                         </a:rPr>
-                        <a:t>198</a:t>
+                        <a:t>197</a:t>
                       </a:r>
                     </a:p>
                   </a:txBody>
@@ -4428,7 +4428,7 @@
                           </a:solidFill>
                           <a:latin typeface="Segoe UI"/>
                         </a:rPr>
-                        <a:t>103</a:t>
+                        <a:t>108</a:t>
                       </a:r>
                     </a:p>
                   </a:txBody>
@@ -4465,7 +4465,7 @@
                         <a:rPr sz="800">
                           <a:latin typeface="Segoe UI"/>
                         </a:rPr>
-                        <a:t>126</a:t>
+                        <a:t>125</a:t>
                       </a:r>
                     </a:p>
                   </a:txBody>
@@ -4624,7 +4624,7 @@
                           </a:solidFill>
                           <a:latin typeface="Segoe UI"/>
                         </a:rPr>
-                        <a:t>14.1%</a:t>
+                        <a:t>13.7%</a:t>
                       </a:r>
                     </a:p>
                   </a:txBody>
@@ -4703,11 +4703,11 @@
                       <a:r>
                         <a:rPr sz="800">
                           <a:solidFill>
-                            <a:srgbClr val="059669"/>
+                            <a:srgbClr val="DC2626"/>
                           </a:solidFill>
                           <a:latin typeface="Segoe UI"/>
                         </a:rPr>
-                        <a:t>19.4%</a:t>
+                        <a:t>18.5%</a:t>
                       </a:r>
                     </a:p>
                   </a:txBody>
@@ -4747,7 +4747,7 @@
                         <a:rPr sz="800">
                           <a:latin typeface="Segoe UI"/>
                         </a:rPr>
-                        <a:t>23.0%</a:t>
+                        <a:t>22.4%</a:t>
                       </a:r>
                     </a:p>
                   </a:txBody>
@@ -4906,7 +4906,7 @@
                           </a:solidFill>
                           <a:latin typeface="Segoe UI"/>
                         </a:rPr>
-                        <a:t>28</a:t>
+                        <a:t>27</a:t>
                       </a:r>
                     </a:p>
                   </a:txBody>
@@ -5020,7 +5020,7 @@
                         <a:rPr sz="800">
                           <a:latin typeface="Segoe UI"/>
                         </a:rPr>
-                        <a:t>29</a:t>
+                        <a:t>28</a:t>
                       </a:r>
                     </a:p>
                   </a:txBody>
@@ -5259,7 +5259,7 @@
                         <a:rPr sz="800" b="1">
                           <a:latin typeface="Segoe UI"/>
                         </a:rPr>
-                        <a:t>$603.6K</a:t>
+                        <a:t>$604.5K</a:t>
                       </a:r>
                     </a:p>
                   </a:txBody>

--- a/generated/Tier 1 Broker Scorecards/CASCADE INSURANCE SERVICES INC DBA_ CASCADE MUTUAL INSURANCE SERVICES_Broker_Scorecard.pptx
+++ b/generated/Tier 1 Broker Scorecards/CASCADE INSURANCE SERVICES INC DBA_ CASCADE MUTUAL INSURANCE SERVICES_Broker_Scorecard.pptx
@@ -3357,7 +3357,7 @@
                         <a:rPr sz="800">
                           <a:latin typeface="Segoe UI"/>
                         </a:rPr>
-                        <a:t>$1,687,025.60 / $4,772,106.13 / $3,132,889.11</a:t>
+                        <a:t>$1,687,025.60 / $4,757,284.19 / $3,118,067.17</a:t>
                       </a:r>
                     </a:p>
                   </a:txBody>
@@ -3394,7 +3394,7 @@
                         <a:rPr sz="900">
                           <a:latin typeface="Segoe UI"/>
                         </a:rPr>
-                        <a:t>Tier 1  |  10.23% / 15.00%</a:t>
+                        <a:t>Tier 1  |  10.22% / 15.00%</a:t>
                       </a:r>
                     </a:p>
                   </a:txBody>
@@ -3431,7 +3431,7 @@
                         <a:rPr sz="900">
                           <a:latin typeface="Segoe UI"/>
                         </a:rPr>
-                        <a:t>$2,361,835.84  (132.6% achieved)</a:t>
+                        <a:t>$2,361,835.84  (132.0% achieved)</a:t>
                       </a:r>
                     </a:p>
                   </a:txBody>
@@ -3653,7 +3653,7 @@
                         <a:rPr sz="900">
                           <a:latin typeface="Segoe UI"/>
                         </a:rPr>
-                        <a:t>Fleet Subs: 106  |  Binds: 12</a:t>
+                        <a:t>Fleet Subs: 109  |  Binds: 13</a:t>
                       </a:r>
                     </a:p>
                   </a:txBody>
@@ -3690,7 +3690,7 @@
                         <a:rPr sz="900">
                           <a:latin typeface="Segoe UI"/>
                         </a:rPr>
-                        <a:t>Fleet Bound Premium: $1,530,898.89</a:t>
+                        <a:t>Fleet Bound Premium: $1,624,594.87</a:t>
                       </a:r>
                     </a:p>
                   </a:txBody>
@@ -3727,7 +3727,7 @@
                         <a:rPr sz="900">
                           <a:latin typeface="Segoe UI"/>
                         </a:rPr>
-                        <a:t>Fleet Book %: 48.9%</a:t>
+                        <a:t>Fleet Book %: 52.1%</a:t>
                       </a:r>
                     </a:p>
                   </a:txBody>
@@ -3766,7 +3766,7 @@
                         <a:rPr sz="900">
                           <a:latin typeface="Segoe UI"/>
                         </a:rPr>
-                        <a:t>Non-Fleet Subs: 559  |  Binds: 56</a:t>
+                        <a:t>Non-Fleet Subs: 566  |  Binds: 56</a:t>
                       </a:r>
                     </a:p>
                   </a:txBody>
@@ -3803,7 +3803,7 @@
                         <a:rPr sz="900">
                           <a:latin typeface="Segoe UI"/>
                         </a:rPr>
-                        <a:t>Non-Fleet Bound Premium: $1,601,990.22</a:t>
+                        <a:t>Non-Fleet Bound Premium: $1,493,472.30</a:t>
                       </a:r>
                     </a:p>
                   </a:txBody>
@@ -3840,7 +3840,7 @@
                         <a:rPr sz="900">
                           <a:latin typeface="Segoe UI"/>
                         </a:rPr>
-                        <a:t>Non-Fleet Book %: 51.1%</a:t>
+                        <a:t>Non-Fleet Book %: 47.9%</a:t>
                       </a:r>
                     </a:p>
                   </a:txBody>
@@ -4428,7 +4428,7 @@
                           </a:solidFill>
                           <a:latin typeface="Segoe UI"/>
                         </a:rPr>
-                        <a:t>108</a:t>
+                        <a:t>124</a:t>
                       </a:r>
                     </a:p>
                   </a:txBody>
@@ -4707,7 +4707,7 @@
                           </a:solidFill>
                           <a:latin typeface="Segoe UI"/>
                         </a:rPr>
-                        <a:t>18.5%</a:t>
+                        <a:t>16.9%</a:t>
                       </a:r>
                     </a:p>
                   </a:txBody>
@@ -4983,7 +4983,7 @@
                           </a:solidFill>
                           <a:latin typeface="Segoe UI"/>
                         </a:rPr>
-                        <a:t>20</a:t>
+                        <a:t>21</a:t>
                       </a:r>
                     </a:p>
                   </a:txBody>
@@ -5259,7 +5259,7 @@
                         <a:rPr sz="800" b="1">
                           <a:latin typeface="Segoe UI"/>
                         </a:rPr>
-                        <a:t>$604.5K</a:t>
+                        <a:t>$589.7K</a:t>
                       </a:r>
                     </a:p>
                   </a:txBody>

--- a/generated/Tier 1 Broker Scorecards/CASCADE INSURANCE SERVICES INC DBA_ CASCADE MUTUAL INSURANCE SERVICES_Broker_Scorecard.pptx
+++ b/generated/Tier 1 Broker Scorecards/CASCADE INSURANCE SERVICES INC DBA_ CASCADE MUTUAL INSURANCE SERVICES_Broker_Scorecard.pptx
@@ -3357,7 +3357,7 @@
                         <a:rPr sz="800">
                           <a:latin typeface="Segoe UI"/>
                         </a:rPr>
-                        <a:t>$1,687,025.60 / $4,757,284.19 / $3,118,067.17</a:t>
+                        <a:t>$1,687,025.60 / $4,769,140.28 / $3,129,923.26</a:t>
                       </a:r>
                     </a:p>
                   </a:txBody>
@@ -3394,7 +3394,7 @@
                         <a:rPr sz="900">
                           <a:latin typeface="Segoe UI"/>
                         </a:rPr>
-                        <a:t>Tier 1  |  10.22% / 15.00%</a:t>
+                        <a:t>Tier 1  |  9.88% / 15.00%</a:t>
                       </a:r>
                     </a:p>
                   </a:txBody>
@@ -3431,7 +3431,7 @@
                         <a:rPr sz="900">
                           <a:latin typeface="Segoe UI"/>
                         </a:rPr>
-                        <a:t>$2,361,835.84  (132.0% achieved)</a:t>
+                        <a:t>$2,361,835.84  (132.5% achieved)</a:t>
                       </a:r>
                     </a:p>
                   </a:txBody>
@@ -3653,7 +3653,7 @@
                         <a:rPr sz="900">
                           <a:latin typeface="Segoe UI"/>
                         </a:rPr>
-                        <a:t>Fleet Subs: 109  |  Binds: 13</a:t>
+                        <a:t>Fleet Subs: 110  |  Binds: 11</a:t>
                       </a:r>
                     </a:p>
                   </a:txBody>
@@ -3690,7 +3690,7 @@
                         <a:rPr sz="900">
                           <a:latin typeface="Segoe UI"/>
                         </a:rPr>
-                        <a:t>Fleet Bound Premium: $1,624,594.87</a:t>
+                        <a:t>Fleet Bound Premium: $1,431,026.94</a:t>
                       </a:r>
                     </a:p>
                   </a:txBody>
@@ -3727,7 +3727,7 @@
                         <a:rPr sz="900">
                           <a:latin typeface="Segoe UI"/>
                         </a:rPr>
-                        <a:t>Fleet Book %: 52.1%</a:t>
+                        <a:t>Fleet Book %: 45.7%</a:t>
                       </a:r>
                     </a:p>
                   </a:txBody>
@@ -3766,7 +3766,7 @@
                         <a:rPr sz="900">
                           <a:latin typeface="Segoe UI"/>
                         </a:rPr>
-                        <a:t>Non-Fleet Subs: 566  |  Binds: 56</a:t>
+                        <a:t>Non-Fleet Subs: 568  |  Binds: 56</a:t>
                       </a:r>
                     </a:p>
                   </a:txBody>
@@ -3803,7 +3803,7 @@
                         <a:rPr sz="900">
                           <a:latin typeface="Segoe UI"/>
                         </a:rPr>
-                        <a:t>Non-Fleet Bound Premium: $1,493,472.30</a:t>
+                        <a:t>Non-Fleet Bound Premium: $1,698,896.32</a:t>
                       </a:r>
                     </a:p>
                   </a:txBody>
@@ -3840,7 +3840,7 @@
                         <a:rPr sz="900">
                           <a:latin typeface="Segoe UI"/>
                         </a:rPr>
-                        <a:t>Non-Fleet Book %: 47.9%</a:t>
+                        <a:t>Non-Fleet Book %: 54.3%</a:t>
                       </a:r>
                     </a:p>
                   </a:txBody>
@@ -4428,7 +4428,7 @@
                           </a:solidFill>
                           <a:latin typeface="Segoe UI"/>
                         </a:rPr>
-                        <a:t>124</a:t>
+                        <a:t>128</a:t>
                       </a:r>
                     </a:p>
                   </a:txBody>
@@ -4707,7 +4707,7 @@
                           </a:solidFill>
                           <a:latin typeface="Segoe UI"/>
                         </a:rPr>
-                        <a:t>16.9%</a:t>
+                        <a:t>15.6%</a:t>
                       </a:r>
                     </a:p>
                   </a:txBody>
@@ -4983,7 +4983,7 @@
                           </a:solidFill>
                           <a:latin typeface="Segoe UI"/>
                         </a:rPr>
-                        <a:t>21</a:t>
+                        <a:t>20</a:t>
                       </a:r>
                     </a:p>
                   </a:txBody>
@@ -5259,7 +5259,7 @@
                         <a:rPr sz="800" b="1">
                           <a:latin typeface="Segoe UI"/>
                         </a:rPr>
-                        <a:t>$589.7K</a:t>
+                        <a:t>$601.6K</a:t>
                       </a:r>
                     </a:p>
                   </a:txBody>

--- a/generated/Tier 1 Broker Scorecards/CASCADE INSURANCE SERVICES INC DBA_ CASCADE MUTUAL INSURANCE SERVICES_Broker_Scorecard.pptx
+++ b/generated/Tier 1 Broker Scorecards/CASCADE INSURANCE SERVICES INC DBA_ CASCADE MUTUAL INSURANCE SERVICES_Broker_Scorecard.pptx
@@ -3394,7 +3394,7 @@
                         <a:rPr sz="900">
                           <a:latin typeface="Segoe UI"/>
                         </a:rPr>
-                        <a:t>Tier 1  |  9.88% / 15.00%</a:t>
+                        <a:t>Tier 1  |  9.85% / 15.00%</a:t>
                       </a:r>
                     </a:p>
                   </a:txBody>
@@ -3653,7 +3653,7 @@
                         <a:rPr sz="900">
                           <a:latin typeface="Segoe UI"/>
                         </a:rPr>
-                        <a:t>Fleet Subs: 110  |  Binds: 11</a:t>
+                        <a:t>Fleet Subs: 112  |  Binds: 11</a:t>
                       </a:r>
                     </a:p>
                   </a:txBody>
@@ -3690,7 +3690,7 @@
                         <a:rPr sz="900">
                           <a:latin typeface="Segoe UI"/>
                         </a:rPr>
-                        <a:t>Fleet Bound Premium: $1,431,026.94</a:t>
+                        <a:t>Fleet Bound Premium: $1,416,992.59</a:t>
                       </a:r>
                     </a:p>
                   </a:txBody>
@@ -3727,7 +3727,7 @@
                         <a:rPr sz="900">
                           <a:latin typeface="Segoe UI"/>
                         </a:rPr>
-                        <a:t>Fleet Book %: 45.7%</a:t>
+                        <a:t>Fleet Book %: 45.3%</a:t>
                       </a:r>
                     </a:p>
                   </a:txBody>
@@ -3803,7 +3803,7 @@
                         <a:rPr sz="900">
                           <a:latin typeface="Segoe UI"/>
                         </a:rPr>
-                        <a:t>Non-Fleet Bound Premium: $1,698,896.32</a:t>
+                        <a:t>Non-Fleet Bound Premium: $1,712,930.67</a:t>
                       </a:r>
                     </a:p>
                   </a:txBody>
@@ -3840,7 +3840,7 @@
                         <a:rPr sz="900">
                           <a:latin typeface="Segoe UI"/>
                         </a:rPr>
-                        <a:t>Non-Fleet Book %: 54.3%</a:t>
+                        <a:t>Non-Fleet Book %: 54.7%</a:t>
                       </a:r>
                     </a:p>
                   </a:txBody>
@@ -4424,11 +4424,11 @@
                       <a:r>
                         <a:rPr sz="800">
                           <a:solidFill>
-                            <a:srgbClr val="DC2626"/>
+                            <a:srgbClr val="059669"/>
                           </a:solidFill>
                           <a:latin typeface="Segoe UI"/>
                         </a:rPr>
-                        <a:t>128</a:t>
+                        <a:t>130</a:t>
                       </a:r>
                     </a:p>
                   </a:txBody>
@@ -4664,7 +4664,7 @@
                         <a:rPr sz="800">
                           <a:latin typeface="Segoe UI"/>
                         </a:rPr>
-                        <a:t>19.4%</a:t>
+                        <a:t>18.6%</a:t>
                       </a:r>
                     </a:p>
                   </a:txBody>
@@ -4707,7 +4707,7 @@
                           </a:solidFill>
                           <a:latin typeface="Segoe UI"/>
                         </a:rPr>
-                        <a:t>15.6%</a:t>
+                        <a:t>16.2%</a:t>
                       </a:r>
                     </a:p>
                   </a:txBody>
@@ -4943,7 +4943,7 @@
                         <a:rPr sz="800">
                           <a:latin typeface="Segoe UI"/>
                         </a:rPr>
-                        <a:t>25</a:t>
+                        <a:t>24</a:t>
                       </a:r>
                     </a:p>
                   </a:txBody>
@@ -4983,7 +4983,7 @@
                           </a:solidFill>
                           <a:latin typeface="Segoe UI"/>
                         </a:rPr>
-                        <a:t>20</a:t>
+                        <a:t>21</a:t>
                       </a:r>
                     </a:p>
                   </a:txBody>

--- a/generated/Tier 1 Broker Scorecards/CASCADE INSURANCE SERVICES INC DBA_ CASCADE MUTUAL INSURANCE SERVICES_Broker_Scorecard.pptx
+++ b/generated/Tier 1 Broker Scorecards/CASCADE INSURANCE SERVICES INC DBA_ CASCADE MUTUAL INSURANCE SERVICES_Broker_Scorecard.pptx
@@ -3394,7 +3394,7 @@
                         <a:rPr sz="900">
                           <a:latin typeface="Segoe UI"/>
                         </a:rPr>
-                        <a:t>Tier 1  |  9.85% / 15.00%</a:t>
+                        <a:t>Tier 1  |  9.84% / 15.00%</a:t>
                       </a:r>
                     </a:p>
                   </a:txBody>
@@ -3690,7 +3690,7 @@
                         <a:rPr sz="900">
                           <a:latin typeface="Segoe UI"/>
                         </a:rPr>
-                        <a:t>Fleet Bound Premium: $1,416,992.59</a:t>
+                        <a:t>Fleet Bound Premium: $1,426,786.00</a:t>
                       </a:r>
                     </a:p>
                   </a:txBody>
@@ -3727,7 +3727,7 @@
                         <a:rPr sz="900">
                           <a:latin typeface="Segoe UI"/>
                         </a:rPr>
-                        <a:t>Fleet Book %: 45.3%</a:t>
+                        <a:t>Fleet Book %: 45.6%</a:t>
                       </a:r>
                     </a:p>
                   </a:txBody>
@@ -3766,7 +3766,7 @@
                         <a:rPr sz="900">
                           <a:latin typeface="Segoe UI"/>
                         </a:rPr>
-                        <a:t>Non-Fleet Subs: 568  |  Binds: 56</a:t>
+                        <a:t>Non-Fleet Subs: 569  |  Binds: 56</a:t>
                       </a:r>
                     </a:p>
                   </a:txBody>
@@ -3803,7 +3803,7 @@
                         <a:rPr sz="900">
                           <a:latin typeface="Segoe UI"/>
                         </a:rPr>
-                        <a:t>Non-Fleet Bound Premium: $1,712,930.67</a:t>
+                        <a:t>Non-Fleet Bound Premium: $1,703,137.26</a:t>
                       </a:r>
                     </a:p>
                   </a:txBody>
@@ -3840,7 +3840,7 @@
                         <a:rPr sz="900">
                           <a:latin typeface="Segoe UI"/>
                         </a:rPr>
-                        <a:t>Non-Fleet Book %: 54.7%</a:t>
+                        <a:t>Non-Fleet Book %: 54.4%</a:t>
                       </a:r>
                     </a:p>
                   </a:txBody>
@@ -4428,7 +4428,7 @@
                           </a:solidFill>
                           <a:latin typeface="Segoe UI"/>
                         </a:rPr>
-                        <a:t>130</a:t>
+                        <a:t>131</a:t>
                       </a:r>
                     </a:p>
                   </a:txBody>
@@ -4664,7 +4664,7 @@
                         <a:rPr sz="800">
                           <a:latin typeface="Segoe UI"/>
                         </a:rPr>
-                        <a:t>18.6%</a:t>
+                        <a:t>19.4%</a:t>
                       </a:r>
                     </a:p>
                   </a:txBody>
@@ -4707,7 +4707,7 @@
                           </a:solidFill>
                           <a:latin typeface="Segoe UI"/>
                         </a:rPr>
-                        <a:t>16.2%</a:t>
+                        <a:t>16.0%</a:t>
                       </a:r>
                     </a:p>
                   </a:txBody>
@@ -4943,7 +4943,7 @@
                         <a:rPr sz="800">
                           <a:latin typeface="Segoe UI"/>
                         </a:rPr>
-                        <a:t>24</a:t>
+                        <a:t>25</a:t>
                       </a:r>
                     </a:p>
                   </a:txBody>

--- a/generated/Tier 1 Broker Scorecards/CASCADE INSURANCE SERVICES INC DBA_ CASCADE MUTUAL INSURANCE SERVICES_Broker_Scorecard.pptx
+++ b/generated/Tier 1 Broker Scorecards/CASCADE INSURANCE SERVICES INC DBA_ CASCADE MUTUAL INSURANCE SERVICES_Broker_Scorecard.pptx
@@ -3690,7 +3690,7 @@
                         <a:rPr sz="900">
                           <a:latin typeface="Segoe UI"/>
                         </a:rPr>
-                        <a:t>Fleet Bound Premium: $1,426,786.00</a:t>
+                        <a:t>Fleet Bound Premium: $1,416,587.80</a:t>
                       </a:r>
                     </a:p>
                   </a:txBody>
@@ -3727,7 +3727,7 @@
                         <a:rPr sz="900">
                           <a:latin typeface="Segoe UI"/>
                         </a:rPr>
-                        <a:t>Fleet Book %: 45.6%</a:t>
+                        <a:t>Fleet Book %: 45.3%</a:t>
                       </a:r>
                     </a:p>
                   </a:txBody>
@@ -3803,7 +3803,7 @@
                         <a:rPr sz="900">
                           <a:latin typeface="Segoe UI"/>
                         </a:rPr>
-                        <a:t>Non-Fleet Bound Premium: $1,703,137.26</a:t>
+                        <a:t>Non-Fleet Bound Premium: $1,713,335.46</a:t>
                       </a:r>
                     </a:p>
                   </a:txBody>
@@ -3840,7 +3840,7 @@
                         <a:rPr sz="900">
                           <a:latin typeface="Segoe UI"/>
                         </a:rPr>
-                        <a:t>Non-Fleet Book %: 54.4%</a:t>
+                        <a:t>Non-Fleet Book %: 54.7%</a:t>
                       </a:r>
                     </a:p>
                   </a:txBody>
@@ -4465,7 +4465,7 @@
                         <a:rPr sz="800">
                           <a:latin typeface="Segoe UI"/>
                         </a:rPr>
-                        <a:t>125</a:t>
+                        <a:t>126</a:t>
                       </a:r>
                     </a:p>
                   </a:txBody>
@@ -4664,7 +4664,7 @@
                         <a:rPr sz="800">
                           <a:latin typeface="Segoe UI"/>
                         </a:rPr>
-                        <a:t>19.4%</a:t>
+                        <a:t>18.6%</a:t>
                       </a:r>
                     </a:p>
                   </a:txBody>
@@ -4747,7 +4747,7 @@
                         <a:rPr sz="800">
                           <a:latin typeface="Segoe UI"/>
                         </a:rPr>
-                        <a:t>22.4%</a:t>
+                        <a:t>23.0%</a:t>
                       </a:r>
                     </a:p>
                   </a:txBody>
@@ -4943,7 +4943,7 @@
                         <a:rPr sz="800">
                           <a:latin typeface="Segoe UI"/>
                         </a:rPr>
-                        <a:t>25</a:t>
+                        <a:t>24</a:t>
                       </a:r>
                     </a:p>
                   </a:txBody>
@@ -5020,7 +5020,7 @@
                         <a:rPr sz="800">
                           <a:latin typeface="Segoe UI"/>
                         </a:rPr>
-                        <a:t>28</a:t>
+                        <a:t>29</a:t>
                       </a:r>
                     </a:p>
                   </a:txBody>
